--- a/presentations/KM0-Origen-Local-CA.pptx
+++ b/presentations/KM0-Origen-Local-CA.pptx
@@ -4012,7 +4012,7 @@
               </a:defRPr>
             </a:pPr>
             <a:r>
-              <a:t>Trobada de visió a Masnou — per què i per a qui</a:t>
+              <a:t>Trobada de visió a Masnou: per què i per a qui</a:t>
             </a:r>
           </a:p>
         </p:txBody>
@@ -4594,7 +4594,7 @@
               </a:defRPr>
             </a:pPr>
             <a:r>
-              <a:t>Serveis oberts, propers i sostenibles — no un altre proveïdor més</a:t>
+              <a:t>Serveis oberts, propers i sostenibles, no un altre proveïdor més</a:t>
             </a:r>
           </a:p>
           <a:p>
@@ -5491,7 +5491,7 @@
               </a:defRPr>
             </a:pPr>
             <a:r>
-              <a:t>KM0 Cloud — ja en producció</a:t>
+              <a:t>KM0 Cloud, ja en producció</a:t>
             </a:r>
           </a:p>
         </p:txBody>
@@ -5747,7 +5747,7 @@
               </a:defRPr>
             </a:pPr>
             <a:r>
-              <a:t>OpenCloud — la plataforma oberta</a:t>
+              <a:t>OpenCloud, la plataforma oberta</a:t>
             </a:r>
           </a:p>
         </p:txBody>
@@ -6395,7 +6395,7 @@
               </a:defRPr>
             </a:pPr>
             <a:r>
-              <a:t>Operat per AMVARA CONSULTING S.L. — certificat ISO/IEC 27001:2022</a:t>
+              <a:t>Operat per AMVARA CONSULTING S.L., certificat ISO/IEC 27001:2022</a:t>
             </a:r>
           </a:p>
           <a:p>
